--- a/madd-plus/waw/01-alif.pptx
+++ b/madd-plus/waw/01-alif.pptx
@@ -25126,7 +25126,7 @@
         </p:nvSpPr>
         <p:spPr>
           <a:xfrm>
-            <a:off x="4686061" y="896112"/>
+            <a:off x="4826018" y="896112"/>
             <a:ext cx="1625140" cy="1371600"/>
           </a:xfrm>
           <a:prstGeom prst="roundRect">
@@ -25153,7 +25153,7 @@
         </p:nvSpPr>
         <p:spPr>
           <a:xfrm>
-            <a:off x="4686061" y="896112"/>
+            <a:off x="4826018" y="896112"/>
             <a:ext cx="1625140" cy="1371600"/>
           </a:xfrm>
           <a:prstGeom prst="rect">
@@ -25192,8 +25192,8 @@
         </p:nvSpPr>
         <p:spPr>
           <a:xfrm>
-            <a:off x="2832799" y="896112"/>
-            <a:ext cx="1533222" cy="1371600"/>
+            <a:off x="2692841" y="896112"/>
+            <a:ext cx="1813137" cy="1371600"/>
           </a:xfrm>
           <a:prstGeom prst="roundRect">
             <a:avLst>
@@ -25219,8 +25219,8 @@
         </p:nvSpPr>
         <p:spPr>
           <a:xfrm>
-            <a:off x="2832799" y="896112"/>
-            <a:ext cx="1533222" cy="1371600"/>
+            <a:off x="2692841" y="896112"/>
+            <a:ext cx="1813137" cy="1371600"/>
           </a:xfrm>
           <a:prstGeom prst="rect">
             <a:avLst/>
@@ -25244,7 +25244,7 @@
                 <a:ea typeface="Arial" pitchFamily="34" charset="-122"/>
                 <a:cs typeface="Arial" pitchFamily="34" charset="-120"/>
               </a:rPr>
-              <a:t>عِلْمًا</a:t>
+              <a:t>عِلۡمًا</a:t>
             </a:r>
             <a:endParaRPr lang="ar-SA" sz="3700" dirty="0"/>
           </a:p>
@@ -25283,8 +25283,8 @@
         </p:nvSpPr>
         <p:spPr>
           <a:xfrm>
-            <a:off x="3193255" y="2834640"/>
-            <a:ext cx="2757491" cy="1417320"/>
+            <a:off x="3052262" y="2834640"/>
+            <a:ext cx="3039477" cy="1417320"/>
           </a:xfrm>
           <a:prstGeom prst="roundRect">
             <a:avLst>
@@ -25310,8 +25310,8 @@
         </p:nvSpPr>
         <p:spPr>
           <a:xfrm>
-            <a:off x="3193255" y="2834640"/>
-            <a:ext cx="2757491" cy="1417320"/>
+            <a:off x="3052262" y="2834640"/>
+            <a:ext cx="3039477" cy="1417320"/>
           </a:xfrm>
           <a:prstGeom prst="rect">
             <a:avLst/>
@@ -25335,7 +25335,7 @@
                 <a:ea typeface="Arial" pitchFamily="34" charset="-122"/>
                 <a:cs typeface="Arial" pitchFamily="34" charset="-120"/>
               </a:rPr>
-              <a:t>أُوتِيَ عِلْمًا</a:t>
+              <a:t>أُوتِيَ عِلۡمًا</a:t>
             </a:r>
             <a:endParaRPr lang="ar-SA" sz="3700" dirty="0"/>
           </a:p>
@@ -26054,8 +26054,8 @@
         </p:nvSpPr>
         <p:spPr>
           <a:xfrm>
-            <a:off x="4954865" y="896112"/>
-            <a:ext cx="1918813" cy="1371600"/>
+            <a:off x="4986700" y="896112"/>
+            <a:ext cx="2388050" cy="1371600"/>
           </a:xfrm>
           <a:prstGeom prst="roundRect">
             <a:avLst>
@@ -26081,8 +26081,8 @@
         </p:nvSpPr>
         <p:spPr>
           <a:xfrm>
-            <a:off x="4954865" y="896112"/>
-            <a:ext cx="1918813" cy="1371600"/>
+            <a:off x="4986700" y="896112"/>
+            <a:ext cx="2388050" cy="1371600"/>
           </a:xfrm>
           <a:prstGeom prst="rect">
             <a:avLst/>
@@ -26098,7 +26098,7 @@
               <a:buNone/>
             </a:pPr>
             <a:r>
-              <a:rPr lang="ar-SA" altLang="en-US" sz="3500" dirty="0">
+              <a:rPr lang="ar-SA" altLang="en-US" sz="4000" dirty="0">
                 <a:solidFill>
                   <a:srgbClr val="16213E"/>
                 </a:solidFill>
@@ -26106,9 +26106,9 @@
                 <a:ea typeface="Arial" pitchFamily="34" charset="-122"/>
                 <a:cs typeface="Arial" pitchFamily="34" charset="-120"/>
               </a:rPr>
-              <a:t>يَأْكُلُونَ</a:t>
+              <a:t>يَأۡكُلُونَ</a:t>
             </a:r>
-            <a:endParaRPr lang="ar-SA" sz="3500" dirty="0"/>
+            <a:endParaRPr lang="ar-SA" sz="4000" dirty="0"/>
           </a:p>
         </p:txBody>
       </p:sp>
@@ -26120,8 +26120,8 @@
         </p:nvSpPr>
         <p:spPr>
           <a:xfrm>
-            <a:off x="2270323" y="896112"/>
-            <a:ext cx="2364502" cy="1371600"/>
+            <a:off x="1769250" y="896112"/>
+            <a:ext cx="2897410" cy="1371600"/>
           </a:xfrm>
           <a:prstGeom prst="roundRect">
             <a:avLst>
@@ -26147,8 +26147,8 @@
         </p:nvSpPr>
         <p:spPr>
           <a:xfrm>
-            <a:off x="2270323" y="896112"/>
-            <a:ext cx="2364502" cy="1371600"/>
+            <a:off x="1769250" y="896112"/>
+            <a:ext cx="2897410" cy="1371600"/>
           </a:xfrm>
           <a:prstGeom prst="rect">
             <a:avLst/>
@@ -26164,7 +26164,7 @@
               <a:buNone/>
             </a:pPr>
             <a:r>
-              <a:rPr lang="ar-SA" altLang="en-US" sz="3500" dirty="0">
+              <a:rPr lang="ar-SA" altLang="en-US" sz="4000" dirty="0">
                 <a:solidFill>
                   <a:srgbClr val="16213E"/>
                 </a:solidFill>
@@ -26172,9 +26172,9 @@
                 <a:ea typeface="Arial" pitchFamily="34" charset="-122"/>
                 <a:cs typeface="Arial" pitchFamily="34" charset="-120"/>
               </a:rPr>
-              <a:t>وَيَشْرَبُونَ</a:t>
+              <a:t>وَيَشۡرَبُونَ</a:t>
             </a:r>
-            <a:endParaRPr lang="ar-SA" sz="3500" dirty="0"/>
+            <a:endParaRPr lang="ar-SA" sz="4000" dirty="0"/>
           </a:p>
         </p:txBody>
       </p:sp>
@@ -26211,8 +26211,8 @@
         </p:nvSpPr>
         <p:spPr>
           <a:xfrm>
-            <a:off x="2638830" y="2834640"/>
-            <a:ext cx="3866340" cy="1417320"/>
+            <a:off x="2073336" y="2834640"/>
+            <a:ext cx="4997329" cy="1417320"/>
           </a:xfrm>
           <a:prstGeom prst="roundRect">
             <a:avLst>
@@ -26238,8 +26238,8 @@
         </p:nvSpPr>
         <p:spPr>
           <a:xfrm>
-            <a:off x="2638830" y="2834640"/>
-            <a:ext cx="3866340" cy="1417320"/>
+            <a:off x="2073336" y="2834640"/>
+            <a:ext cx="4997329" cy="1417320"/>
           </a:xfrm>
           <a:prstGeom prst="rect">
             <a:avLst/>
@@ -26255,7 +26255,7 @@
               <a:buNone/>
             </a:pPr>
             <a:r>
-              <a:rPr lang="ar-SA" altLang="en-US" sz="3500" dirty="0">
+              <a:rPr lang="ar-SA" altLang="en-US" sz="4100" dirty="0">
                 <a:solidFill>
                   <a:srgbClr val="16213E"/>
                 </a:solidFill>
@@ -26263,9 +26263,9 @@
                 <a:ea typeface="Arial" pitchFamily="34" charset="-122"/>
                 <a:cs typeface="Arial" pitchFamily="34" charset="-120"/>
               </a:rPr>
-              <a:t>يَأْكُلُونَ وَيَشْرَبُونَ</a:t>
+              <a:t>يَأۡكُلُونَ وَيَشۡرَبُونَ</a:t>
             </a:r>
-            <a:endParaRPr lang="ar-SA" sz="3500" dirty="0"/>
+            <a:endParaRPr lang="ar-SA" sz="4100" dirty="0"/>
           </a:p>
         </p:txBody>
       </p:sp>

--- a/madd-plus/waw/01-alif.pptx
+++ b/madd-plus/waw/01-alif.pptx
@@ -25240,9 +25240,9 @@
                 <a:solidFill>
                   <a:srgbClr val="16213E"/>
                 </a:solidFill>
-                <a:latin typeface="Arial" pitchFamily="34" charset="0"/>
-                <a:ea typeface="Arial" pitchFamily="34" charset="-122"/>
-                <a:cs typeface="Arial" pitchFamily="34" charset="-120"/>
+                <a:latin typeface="Traditional Arabic" pitchFamily="34" charset="0"/>
+                <a:ea typeface="Traditional Arabic" pitchFamily="34" charset="-122"/>
+                <a:cs typeface="Traditional Arabic" pitchFamily="34" charset="-120"/>
               </a:rPr>
               <a:t>عِلۡمًا</a:t>
             </a:r>
@@ -25331,9 +25331,9 @@
                 <a:solidFill>
                   <a:srgbClr val="16213E"/>
                 </a:solidFill>
-                <a:latin typeface="Arial" pitchFamily="34" charset="0"/>
-                <a:ea typeface="Arial" pitchFamily="34" charset="-122"/>
-                <a:cs typeface="Arial" pitchFamily="34" charset="-120"/>
+                <a:latin typeface="Traditional Arabic" pitchFamily="34" charset="0"/>
+                <a:ea typeface="Traditional Arabic" pitchFamily="34" charset="-122"/>
+                <a:cs typeface="Traditional Arabic" pitchFamily="34" charset="-120"/>
               </a:rPr>
               <a:t>أُوتِيَ عِلۡمًا</a:t>
             </a:r>
@@ -26102,9 +26102,9 @@
                 <a:solidFill>
                   <a:srgbClr val="16213E"/>
                 </a:solidFill>
-                <a:latin typeface="Arial" pitchFamily="34" charset="0"/>
-                <a:ea typeface="Arial" pitchFamily="34" charset="-122"/>
-                <a:cs typeface="Arial" pitchFamily="34" charset="-120"/>
+                <a:latin typeface="Traditional Arabic" pitchFamily="34" charset="0"/>
+                <a:ea typeface="Traditional Arabic" pitchFamily="34" charset="-122"/>
+                <a:cs typeface="Traditional Arabic" pitchFamily="34" charset="-120"/>
               </a:rPr>
               <a:t>يَأۡكُلُونَ</a:t>
             </a:r>
@@ -26168,9 +26168,9 @@
                 <a:solidFill>
                   <a:srgbClr val="16213E"/>
                 </a:solidFill>
-                <a:latin typeface="Arial" pitchFamily="34" charset="0"/>
-                <a:ea typeface="Arial" pitchFamily="34" charset="-122"/>
-                <a:cs typeface="Arial" pitchFamily="34" charset="-120"/>
+                <a:latin typeface="Traditional Arabic" pitchFamily="34" charset="0"/>
+                <a:ea typeface="Traditional Arabic" pitchFamily="34" charset="-122"/>
+                <a:cs typeface="Traditional Arabic" pitchFamily="34" charset="-120"/>
               </a:rPr>
               <a:t>وَيَشۡرَبُونَ</a:t>
             </a:r>
@@ -26259,9 +26259,9 @@
                 <a:solidFill>
                   <a:srgbClr val="16213E"/>
                 </a:solidFill>
-                <a:latin typeface="Arial" pitchFamily="34" charset="0"/>
-                <a:ea typeface="Arial" pitchFamily="34" charset="-122"/>
-                <a:cs typeface="Arial" pitchFamily="34" charset="-120"/>
+                <a:latin typeface="Traditional Arabic" pitchFamily="34" charset="0"/>
+                <a:ea typeface="Traditional Arabic" pitchFamily="34" charset="-122"/>
+                <a:cs typeface="Traditional Arabic" pitchFamily="34" charset="-120"/>
               </a:rPr>
               <a:t>يَأۡكُلُونَ وَيَشۡرَبُونَ</a:t>
             </a:r>

--- a/madd-plus/waw/01-alif.pptx
+++ b/madd-plus/waw/01-alif.pptx
@@ -4,6 +4,9 @@
   <p:sldMasterIdLst>
     <p:sldMasterId id="2147483648" r:id="rId1"/>
   </p:sldMasterIdLst>
+  <p:notesMasterIdLst>
+    <p:notesMasterId r:id="rId27"/>
+  </p:notesMasterIdLst>
   <p:sldIdLst>
     <p:sldId id="256" r:id="rId2"/>
     <p:sldId id="257" r:id="rId3"/>
@@ -31,9 +34,6 @@
     <p:sldId id="279" r:id="rId25"/>
     <p:sldId id="280" r:id="rId26"/>
   </p:sldIdLst>
-  <p:notesMasterIdLst>
-    <p:notesMasterId r:id="rId27"/>
-  </p:notesMasterIdLst>
   <p:sldSz cx="9144000" cy="5143500"/>
   <p:notesSz cx="5143500" cy="9144000"/>
   <p:defaultTextStyle>
